--- a/curso/pptx/S35.pptx
+++ b/curso/pptx/S35.pptx
@@ -7459,7 +7459,7 @@
                 </a:solidFill>
                 <a:latin typeface="Nunito Sans"/>
               </a:rPr>
-              <a:t>Cada vez son </a:t>
+              <a:t>它们越来越</a:t>
             </a:r>
             <a:r>
               <a:rPr sz="2800" b="1">
@@ -7468,7 +7468,7 @@
                 </a:solidFill>
                 <a:latin typeface="Nunito Sans"/>
               </a:rPr>
-              <a:t>más difíciles</a:t>
+              <a:t>难以</a:t>
             </a:r>
             <a:r>
               <a:rPr sz="2800" b="0">
@@ -7477,7 +7477,7 @@
                 </a:solidFill>
                 <a:latin typeface="Nunito Sans"/>
               </a:rPr>
-              <a:t> de detectar</a:t>
+              <a:t>识别</a:t>
             </a:r>
           </a:p>
           <a:p>
@@ -7502,7 +7502,7 @@
                 </a:solidFill>
                 <a:latin typeface="Nunito Sans"/>
               </a:rPr>
-              <a:t>Las pistas de antes (labios, manos raras) ya casi no sirven</a:t>
+              <a:t>以前的线索（嘴唇、奇怪的手）现在几乎没有用了</a:t>
             </a:r>
           </a:p>
           <a:p>
@@ -7527,7 +7527,7 @@
                 </a:solidFill>
                 <a:latin typeface="Nunito Sans"/>
               </a:rPr>
-              <a:t>Mejor que mirar el vídeo: buscar la </a:t>
+              <a:t>比起看视频，更好的是去找</a:t>
             </a:r>
             <a:r>
               <a:rPr sz="2800" b="1">
@@ -7536,7 +7536,7 @@
                 </a:solidFill>
                 <a:latin typeface="Nunito Sans"/>
               </a:rPr>
-              <a:t>fuente</a:t>
+              <a:t>来源</a:t>
             </a:r>
           </a:p>
           <a:p>
@@ -7561,7 +7561,7 @@
                 </a:solidFill>
                 <a:latin typeface="Nunito Sans"/>
               </a:rPr>
-              <a:t>Hacer un deepfake de alguien sin permiso puede ser un </a:t>
+              <a:t>未经允许对某个人做深度伪造，可能是</a:t>
             </a:r>
             <a:r>
               <a:rPr sz="2800" b="1">
@@ -7570,7 +7570,7 @@
                 </a:solidFill>
                 <a:latin typeface="Nunito Sans"/>
               </a:rPr>
-              <a:t>delito</a:t>
+              <a:t>犯罪</a:t>
             </a:r>
           </a:p>
         </p:txBody>
@@ -7722,7 +7722,7 @@
                 </a:solidFill>
                 <a:latin typeface="Nunito Sans"/>
               </a:rPr>
-              <a:t>Para:</a:t>
+              <a:t>停一下：</a:t>
             </a:r>
             <a:r>
               <a:rPr sz="2800" b="0">
@@ -7731,7 +7731,7 @@
                 </a:solidFill>
                 <a:latin typeface="Nunito Sans"/>
               </a:rPr>
-              <a:t> si te da mucha emoción, sospecha</a:t>
+              <a:t>如果它让你很激动，就要怀疑</a:t>
             </a:r>
           </a:p>
           <a:p>
@@ -7756,7 +7756,7 @@
                 </a:solidFill>
                 <a:latin typeface="Nunito Sans"/>
               </a:rPr>
-              <a:t>Busca su origen:</a:t>
+              <a:t>找它的来源：</a:t>
             </a:r>
             <a:r>
               <a:rPr sz="2800" b="0">
@@ -7765,7 +7765,7 @@
                 </a:solidFill>
                 <a:latin typeface="Nunito Sans"/>
               </a:rPr>
-              <a:t> búsqueda inversa （第34课）</a:t>
+              <a:t>反向搜索（第34课）</a:t>
             </a:r>
           </a:p>
           <a:p>
@@ -7790,7 +7790,7 @@
                 </a:solidFill>
                 <a:latin typeface="Nunito Sans"/>
               </a:rPr>
-              <a:t>Mira el contexto:</a:t>
+              <a:t>看背景：</a:t>
             </a:r>
             <a:r>
               <a:rPr sz="2800" b="0">
@@ -7799,7 +7799,7 @@
                 </a:solidFill>
                 <a:latin typeface="Nunito Sans"/>
               </a:rPr>
-              <a:t> ¿quién la publicó, dónde y cuándo?</a:t>
+              <a:t>谁发布的，在哪里，什么时候？</a:t>
             </a:r>
           </a:p>
           <a:p>
@@ -7824,7 +7824,7 @@
                 </a:solidFill>
                 <a:latin typeface="Nunito Sans"/>
               </a:rPr>
-              <a:t>Busca la fuente:</a:t>
+              <a:t>找来源：</a:t>
             </a:r>
             <a:r>
               <a:rPr sz="2800" b="0">
@@ -7833,7 +7833,7 @@
                 </a:solidFill>
                 <a:latin typeface="Nunito Sans"/>
               </a:rPr>
-              <a:t> ¿lo cuentan medios serios o la propia persona?</a:t>
+              <a:t>是严肃的媒体在报道，还是本人说的？</a:t>
             </a:r>
           </a:p>
         </p:txBody>

--- a/curso/pptx/S35.pptx
+++ b/curso/pptx/S35.pptx
@@ -4664,7 +4664,7 @@
                 </a:solidFill>
                 <a:latin typeface="Fredoka"/>
               </a:rPr>
-              <a:t>案例 3 · Maialen 的脸</a:t>
+              <a:t>案例 3 · 一个女孩的脸</a:t>
             </a:r>
           </a:p>
         </p:txBody>
@@ -4746,7 +4746,7 @@
                 </a:solidFill>
                 <a:latin typeface="Nunito Sans"/>
               </a:rPr>
-              <a:t>有人用一个应用把 Maialen 的脸放到一段可笑的视频里，并发到班级群里。</a:t>
+              <a:t>有人用一个应用把一个女孩的脸放到一段可笑的视频里，并发到班级群里。</a:t>
             </a:r>
           </a:p>
         </p:txBody>
@@ -4819,7 +4819,7 @@
                 </a:solidFill>
                 <a:latin typeface="Nunito Sans"/>
               </a:rPr>
-              <a:t>它真的伤害了 Maialen，即使“只是个玩笑”。</a:t>
+              <a:t>它真的伤害了这个女孩，即使“只是个玩笑”。</a:t>
             </a:r>
           </a:p>
           <a:p>
@@ -4844,7 +4844,7 @@
                 </a:solidFill>
                 <a:latin typeface="Nunito Sans"/>
               </a:rPr>
-              <a:t>我怎么做：我不转发，告诉一个大人，并支持 Maialen。</a:t>
+              <a:t>我怎么做：我不转发，告诉一个大人，并支持这个女孩。</a:t>
             </a:r>
           </a:p>
           <a:p>
